--- a/single_day/slides/05_track_b_reskin.pptx
+++ b/single_day/slides/05_track_b_reskin.pptx
@@ -1833,7 +1833,7 @@
                 <a:ea typeface="Arial" pitchFamily="34" charset="-122"/>
                 <a:cs typeface="Arial" pitchFamily="34" charset="-120"/>
               </a:rPr>
-              <a:t>Point lights, normal maps, match effects — tuned to your studio style.</a:t>
+              <a:t>Point lights and normal maps tuned to your palette; the shared match effect stays as it is.</a:t>
             </a:r>
             <a:endParaRPr lang="en-US" sz="1150" dirty="0"/>
           </a:p>
@@ -2689,7 +2689,7 @@
                 <a:ea typeface="Arial" pitchFamily="34" charset="-122"/>
                 <a:cs typeface="Arial" pitchFamily="34" charset="-120"/>
               </a:rPr>
-              <a:t>The SpriteRenderer sprite swap on the gem prefabs — through the CLI, without touching scene YAML.</a:t>
+              <a:t>SpriteRenderer sprite + Gem.UISprite (a separate HUD icon set) on the gem prefabs — through the CLI, without touching scene YAML.</a:t>
             </a:r>
             <a:endParaRPr lang="en-US" sz="1200" dirty="0"/>
           </a:p>
@@ -3076,7 +3076,7 @@
                 <a:ea typeface="Arial" pitchFamily="34" charset="-122"/>
                 <a:cs typeface="Arial" pitchFamily="34" charset="-120"/>
               </a:rPr>
-              <a:t>Match VFX alignment</a:t>
+              <a:t>Match VFX check</a:t>
             </a:r>
             <a:endParaRPr lang="en-US" sz="1400" dirty="0"/>
           </a:p>
@@ -3118,7 +3118,7 @@
                 <a:ea typeface="Arial" pitchFamily="34" charset="-122"/>
                 <a:cs typeface="Arial" pitchFamily="34" charset="-120"/>
               </a:rPr>
-              <a:t>Effect colors match the gem colors — through VFX Graph parameters, without breaking the graph.</a:t>
+              <a:t>The shared VFX_CellCrash effect exposes no color parameter — judge it against your palette in play mode; per-gem effects via MatchEffectPrefabs are a follow-up.</a:t>
             </a:r>
             <a:endParaRPr lang="en-US" sz="1200" dirty="0"/>
           </a:p>
